--- a/dist/초2/수학/수와계산/초2_수학_수와계산_04_받아내림이있는두자리수뺄셈_학생용.pptx
+++ b/dist/초2/수학/수와계산/초2_수학_수와계산_04_받아내림이있는두자리수뺄셈_학생용.pptx
@@ -119,13 +119,13 @@
   <p:extLst>
     <p:ext uri="{521415D9-36F7-43E2-AB2F-B90AF26B5E84}">
       <p14:sectionLst xmlns:p14="http://schemas.microsoft.com/office/powerpoint/2010/main">
-        <p14:section name="도입" id="{65d386e9-b3e6-3861-10d7-c0cea136e78f}">
+        <p14:section name="도입" id="{3c4e6252-f7e9-833d-973d-a3f37d68492b}">
           <p14:sldIdLst>
             <p14:sldId id="256"/>
             <p14:sldId id="257"/>
           </p14:sldIdLst>
         </p14:section>
-        <p14:section name="개념" id="{a6adbb2c-5290-b996-300b-74fd1f9a6baa}">
+        <p14:section name="개념" id="{9c3d839b-862d-b01f-75f9-1436792cb011}">
           <p14:sldIdLst>
             <p14:sldId id="258"/>
             <p14:sldId id="259"/>
@@ -133,31 +133,31 @@
             <p14:sldId id="263"/>
           </p14:sldIdLst>
         </p14:section>
-        <p14:section name="연습" id="{19f888c4-df80-1320-9b7d-fcec64fa85b9}">
+        <p14:section name="연습" id="{833acd96-9edd-b78b-78a9-fcf617205f32}">
           <p14:sldIdLst>
             <p14:sldId id="261"/>
             <p14:sldId id="262"/>
             <p14:sldId id="264"/>
           </p14:sldIdLst>
         </p14:section>
-        <p14:section name="개념" id="{d5b8c87a-415a-2724-6e17-adc5bf73b4c7}">
+        <p14:section name="개념" id="{3e75960e-3ce3-1bc1-b689-103031dfc2fb}">
           <p14:sldIdLst/>
         </p14:section>
-        <p14:section name="연습" id="{1a853c0c-3d6f-c29e-5ec6-53ddc2cad9d4}">
+        <p14:section name="연습" id="{23d8893e-c801-09b0-ee3d-ee2e857b373d}">
           <p14:sldIdLst/>
         </p14:section>
-        <p14:section name="확인" id="{7140ae3e-91a8-a1b2-879b-8970b4f2d9cd}">
+        <p14:section name="확인" id="{c4d72089-2f95-5336-aef9-22da94c93ebd}">
           <p14:sldIdLst>
             <p14:sldId id="265"/>
             <p14:sldId id="266"/>
           </p14:sldIdLst>
         </p14:section>
-        <p14:section name="정리" id="{8cdae6bf-e83e-e20a-f7b8-edb922af4b0f}">
+        <p14:section name="정리" id="{bc4949ea-f382-afde-a93e-c1c9e67f1e4a}">
           <p14:sldIdLst>
             <p14:sldId id="267"/>
           </p14:sldIdLst>
         </p14:section>
-        <p14:section name="보충" id="{352a0bf4-9ee0-a572-f771-68422183d70d}">
+        <p14:section name="보충" id="{c7c6cc40-dc67-f108-a329-2a16adc2946e}">
           <p14:sldIdLst>
             <p14:sldId id="268"/>
           </p14:sldIdLst>
@@ -2775,7 +2775,7 @@
           </p:nvPr>
         </p:nvGraphicFramePr>
         <p:xfrm>
-          <a:off x="8001000" y="883920"/>
+          <a:off x="8001000" y="922020"/>
           <a:ext cx="3291840" cy="914400"/>
         </p:xfrm>
         <a:graphic>
@@ -2787,7 +2787,7 @@
                 <a:gridCol w="1097280"/>
                 <a:gridCol w="1097280"/>
               </a:tblGrid>
-              <a:tr h="609600">
+              <a:tr h="590550">
                 <a:tc>
                   <a:txBody>
                     <a:bodyPr/>
@@ -2982,7 +2982,7 @@
                   </a:tcPr>
                 </a:tc>
               </a:tr>
-              <a:tr h="609600">
+              <a:tr h="590550">
                 <a:tc>
                   <a:txBody>
                     <a:bodyPr/>
@@ -3177,7 +3177,7 @@
                   </a:tcPr>
                 </a:tc>
               </a:tr>
-              <a:tr h="609600">
+              <a:tr h="590550">
                 <a:tc>
                   <a:txBody>
                     <a:bodyPr/>
@@ -3383,7 +3383,7 @@
                   </a:tcPr>
                 </a:tc>
               </a:tr>
-              <a:tr h="609600">
+              <a:tr h="590550">
                 <a:tc>
                   <a:txBody>
                     <a:bodyPr/>
@@ -15054,7 +15054,7 @@
           </p:nvPr>
         </p:nvGraphicFramePr>
         <p:xfrm>
-          <a:off x="7956469" y="2042160"/>
+          <a:off x="7956469" y="2089785"/>
           <a:ext cx="3291840" cy="914400"/>
         </p:xfrm>
         <a:graphic>
@@ -15066,7 +15066,7 @@
                 <a:gridCol w="1097280"/>
                 <a:gridCol w="1097280"/>
               </a:tblGrid>
-              <a:tr h="609600">
+              <a:tr h="590550">
                 <a:tc>
                   <a:txBody>
                     <a:bodyPr/>
@@ -15261,7 +15261,7 @@
                   </a:tcPr>
                 </a:tc>
               </a:tr>
-              <a:tr h="609600">
+              <a:tr h="590550">
                 <a:tc>
                   <a:txBody>
                     <a:bodyPr/>
@@ -15456,7 +15456,7 @@
                   </a:tcPr>
                 </a:tc>
               </a:tr>
-              <a:tr h="609600">
+              <a:tr h="590550">
                 <a:tc>
                   <a:txBody>
                     <a:bodyPr/>
@@ -15651,7 +15651,7 @@
                   </a:tcPr>
                 </a:tc>
               </a:tr>
-              <a:tr h="609600">
+              <a:tr h="590550">
                 <a:tc>
                   <a:txBody>
                     <a:bodyPr/>
@@ -15857,7 +15857,7 @@
                   </a:tcPr>
                 </a:tc>
               </a:tr>
-              <a:tr h="609600">
+              <a:tr h="590550">
                 <a:tc>
                   <a:txBody>
                     <a:bodyPr/>
@@ -16629,7 +16629,7 @@
           </p:nvPr>
         </p:nvGraphicFramePr>
         <p:xfrm>
-          <a:off x="7312914" y="2087499"/>
+          <a:off x="7312914" y="2027174"/>
           <a:ext cx="3291840" cy="914400"/>
         </p:xfrm>
         <a:graphic>
@@ -16641,7 +16641,7 @@
                 <a:gridCol w="1097280"/>
                 <a:gridCol w="1097280"/>
               </a:tblGrid>
-              <a:tr h="487680">
+              <a:tr h="511810">
                 <a:tc>
                   <a:txBody>
                     <a:bodyPr/>
@@ -16650,7 +16650,7 @@
                       <a:pPr eaLnBrk="0" algn="ctr" indent="0" marL="0">
                         <a:buNone/>
                       </a:pPr>
-                      <a:endParaRPr lang="en-US" sz="2400" dirty="0">
+                      <a:endParaRPr lang="en-US" sz="2600" dirty="0">
                         <a:latin typeface="맑은 고딕" charset="0"/>
                         <a:ea typeface="맑은 고딕" charset="0"/>
                         <a:cs typeface="맑은 고딕" charset="0"/>
@@ -16708,7 +16708,7 @@
                         <a:buNone/>
                       </a:pPr>
                       <a:r>
-                        <a:rPr lang="en-US" sz="2400" b="1" dirty="0">
+                        <a:rPr lang="en-US" sz="2600" b="1" dirty="0">
                           <a:solidFill>
                             <a:srgbClr val="1F2937"/>
                           </a:solidFill>
@@ -16718,7 +16718,7 @@
                         </a:rPr>
                         <a:t>십</a:t>
                       </a:r>
-                      <a:endParaRPr lang="en-US" sz="2400" dirty="0">
+                      <a:endParaRPr lang="en-US" sz="2600" dirty="0">
                         <a:latin typeface="맑은 고딕" charset="0"/>
                         <a:ea typeface="맑은 고딕" charset="0"/>
                         <a:cs typeface="맑은 고딕" charset="0"/>
@@ -16776,7 +16776,7 @@
                         <a:buNone/>
                       </a:pPr>
                       <a:r>
-                        <a:rPr lang="en-US" sz="2400" b="1" dirty="0">
+                        <a:rPr lang="en-US" sz="2600" b="1" dirty="0">
                           <a:solidFill>
                             <a:srgbClr val="1F2937"/>
                           </a:solidFill>
@@ -16786,7 +16786,7 @@
                         </a:rPr>
                         <a:t>일</a:t>
                       </a:r>
-                      <a:endParaRPr lang="en-US" sz="2400" dirty="0">
+                      <a:endParaRPr lang="en-US" sz="2600" dirty="0">
                         <a:latin typeface="맑은 고딕" charset="0"/>
                         <a:ea typeface="맑은 고딕" charset="0"/>
                         <a:cs typeface="맑은 고딕" charset="0"/>
@@ -16836,7 +16836,7 @@
                   </a:tcPr>
                 </a:tc>
               </a:tr>
-              <a:tr h="487680">
+              <a:tr h="511810">
                 <a:tc>
                   <a:txBody>
                     <a:bodyPr/>
@@ -16845,7 +16845,7 @@
                       <a:pPr eaLnBrk="0" algn="ctr" indent="0" marL="0">
                         <a:buNone/>
                       </a:pPr>
-                      <a:endParaRPr lang="en-US" sz="2400" dirty="0">
+                      <a:endParaRPr lang="en-US" sz="2600" dirty="0">
                         <a:latin typeface="맑은 고딕" charset="0"/>
                         <a:ea typeface="맑은 고딕" charset="0"/>
                         <a:cs typeface="맑은 고딕" charset="0"/>
@@ -16903,7 +16903,7 @@
                         <a:buNone/>
                       </a:pPr>
                       <a:r>
-                        <a:rPr lang="en-US" sz="2400" dirty="0">
+                        <a:rPr lang="en-US" sz="2600" dirty="0">
                           <a:solidFill>
                             <a:srgbClr val="1F2937"/>
                           </a:solidFill>
@@ -16913,7 +16913,7 @@
                         </a:rPr>
                         <a:t>□</a:t>
                       </a:r>
-                      <a:endParaRPr lang="en-US" sz="2400" dirty="0">
+                      <a:endParaRPr lang="en-US" sz="2600" dirty="0">
                         <a:latin typeface="맑은 고딕" charset="0"/>
                         <a:ea typeface="맑은 고딕" charset="0"/>
                         <a:cs typeface="맑은 고딕" charset="0"/>
@@ -16971,7 +16971,7 @@
                         <a:buNone/>
                       </a:pPr>
                       <a:r>
-                        <a:rPr lang="en-US" sz="2400" dirty="0">
+                        <a:rPr lang="en-US" sz="2600" dirty="0">
                           <a:solidFill>
                             <a:srgbClr val="1F2937"/>
                           </a:solidFill>
@@ -16981,7 +16981,7 @@
                         </a:rPr>
                         <a:t>□</a:t>
                       </a:r>
-                      <a:endParaRPr lang="en-US" sz="2400" dirty="0">
+                      <a:endParaRPr lang="en-US" sz="2600" dirty="0">
                         <a:latin typeface="맑은 고딕" charset="0"/>
                         <a:ea typeface="맑은 고딕" charset="0"/>
                         <a:cs typeface="맑은 고딕" charset="0"/>
@@ -17031,7 +17031,7 @@
                   </a:tcPr>
                 </a:tc>
               </a:tr>
-              <a:tr h="487680">
+              <a:tr h="511810">
                 <a:tc>
                   <a:txBody>
                     <a:bodyPr/>
@@ -17040,7 +17040,7 @@
                       <a:pPr eaLnBrk="0" algn="ctr" indent="0" marL="0">
                         <a:buNone/>
                       </a:pPr>
-                      <a:endParaRPr lang="en-US" sz="2400" dirty="0">
+                      <a:endParaRPr lang="en-US" sz="2600" dirty="0">
                         <a:latin typeface="맑은 고딕" charset="0"/>
                         <a:ea typeface="맑은 고딕" charset="0"/>
                         <a:cs typeface="맑은 고딕" charset="0"/>
@@ -17098,7 +17098,7 @@
                         <a:buNone/>
                       </a:pPr>
                       <a:r>
-                        <a:rPr lang="en-US" sz="2400" dirty="0">
+                        <a:rPr lang="en-US" sz="2600" dirty="0">
                           <a:solidFill>
                             <a:srgbClr val="1F2937"/>
                           </a:solidFill>
@@ -17108,7 +17108,7 @@
                         </a:rPr>
                         <a:t>6</a:t>
                       </a:r>
-                      <a:endParaRPr lang="en-US" sz="2400" dirty="0">
+                      <a:endParaRPr lang="en-US" sz="2600" dirty="0">
                         <a:latin typeface="맑은 고딕" charset="0"/>
                         <a:ea typeface="맑은 고딕" charset="0"/>
                         <a:cs typeface="맑은 고딕" charset="0"/>
@@ -17166,7 +17166,7 @@
                         <a:buNone/>
                       </a:pPr>
                       <a:r>
-                        <a:rPr lang="en-US" sz="2400" dirty="0">
+                        <a:rPr lang="en-US" sz="2600" dirty="0">
                           <a:solidFill>
                             <a:srgbClr val="1F2937"/>
                           </a:solidFill>
@@ -17176,7 +17176,7 @@
                         </a:rPr>
                         <a:t>1</a:t>
                       </a:r>
-                      <a:endParaRPr lang="en-US" sz="2400" dirty="0">
+                      <a:endParaRPr lang="en-US" sz="2600" dirty="0">
                         <a:latin typeface="맑은 고딕" charset="0"/>
                         <a:ea typeface="맑은 고딕" charset="0"/>
                         <a:cs typeface="맑은 고딕" charset="0"/>
@@ -17226,7 +17226,7 @@
                   </a:tcPr>
                 </a:tc>
               </a:tr>
-              <a:tr h="487680">
+              <a:tr h="511810">
                 <a:tc>
                   <a:txBody>
                     <a:bodyPr/>
@@ -17236,7 +17236,7 @@
                         <a:buNone/>
                       </a:pPr>
                       <a:r>
-                        <a:rPr lang="en-US" sz="2400" dirty="0">
+                        <a:rPr lang="en-US" sz="2600" dirty="0">
                           <a:solidFill>
                             <a:srgbClr val="1F2937"/>
                           </a:solidFill>
@@ -17246,7 +17246,7 @@
                         </a:rPr>
                         <a:t>−</a:t>
                       </a:r>
-                      <a:endParaRPr lang="en-US" sz="2400" dirty="0">
+                      <a:endParaRPr lang="en-US" sz="2600" dirty="0">
                         <a:latin typeface="맑은 고딕" charset="0"/>
                         <a:ea typeface="맑은 고딕" charset="0"/>
                         <a:cs typeface="맑은 고딕" charset="0"/>
@@ -17304,7 +17304,7 @@
                         <a:buNone/>
                       </a:pPr>
                       <a:r>
-                        <a:rPr lang="en-US" sz="2400" dirty="0">
+                        <a:rPr lang="en-US" sz="2600" dirty="0">
                           <a:solidFill>
                             <a:srgbClr val="1F2937"/>
                           </a:solidFill>
@@ -17314,7 +17314,7 @@
                         </a:rPr>
                         <a:t>2</a:t>
                       </a:r>
-                      <a:endParaRPr lang="en-US" sz="2400" dirty="0">
+                      <a:endParaRPr lang="en-US" sz="2600" dirty="0">
                         <a:latin typeface="맑은 고딕" charset="0"/>
                         <a:ea typeface="맑은 고딕" charset="0"/>
                         <a:cs typeface="맑은 고딕" charset="0"/>
@@ -17372,7 +17372,7 @@
                         <a:buNone/>
                       </a:pPr>
                       <a:r>
-                        <a:rPr lang="en-US" sz="2400" dirty="0">
+                        <a:rPr lang="en-US" sz="2600" dirty="0">
                           <a:solidFill>
                             <a:srgbClr val="1F2937"/>
                           </a:solidFill>
@@ -17382,7 +17382,7 @@
                         </a:rPr>
                         <a:t>5</a:t>
                       </a:r>
-                      <a:endParaRPr lang="en-US" sz="2400" dirty="0">
+                      <a:endParaRPr lang="en-US" sz="2600" dirty="0">
                         <a:latin typeface="맑은 고딕" charset="0"/>
                         <a:ea typeface="맑은 고딕" charset="0"/>
                         <a:cs typeface="맑은 고딕" charset="0"/>
@@ -17432,7 +17432,7 @@
                   </a:tcPr>
                 </a:tc>
               </a:tr>
-              <a:tr h="487680">
+              <a:tr h="511810">
                 <a:tc>
                   <a:txBody>
                     <a:bodyPr/>
@@ -17441,7 +17441,7 @@
                       <a:pPr eaLnBrk="0" algn="ctr" indent="0" marL="0">
                         <a:buNone/>
                       </a:pPr>
-                      <a:endParaRPr lang="en-US" sz="2400" dirty="0">
+                      <a:endParaRPr lang="en-US" sz="2600" dirty="0">
                         <a:latin typeface="맑은 고딕" charset="0"/>
                         <a:ea typeface="맑은 고딕" charset="0"/>
                         <a:cs typeface="맑은 고딕" charset="0"/>
@@ -17499,7 +17499,7 @@
                         <a:buNone/>
                       </a:pPr>
                       <a:r>
-                        <a:rPr lang="en-US" sz="2400" dirty="0">
+                        <a:rPr lang="en-US" sz="2600" dirty="0">
                           <a:solidFill>
                             <a:srgbClr val="1F2937"/>
                           </a:solidFill>
@@ -17509,7 +17509,7 @@
                         </a:rPr>
                         <a:t>□</a:t>
                       </a:r>
-                      <a:endParaRPr lang="en-US" sz="2400" dirty="0">
+                      <a:endParaRPr lang="en-US" sz="2600" dirty="0">
                         <a:latin typeface="맑은 고딕" charset="0"/>
                         <a:ea typeface="맑은 고딕" charset="0"/>
                         <a:cs typeface="맑은 고딕" charset="0"/>
@@ -17567,7 +17567,7 @@
                         <a:buNone/>
                       </a:pPr>
                       <a:r>
-                        <a:rPr lang="en-US" sz="2400" dirty="0">
+                        <a:rPr lang="en-US" sz="2600" dirty="0">
                           <a:solidFill>
                             <a:srgbClr val="1F2937"/>
                           </a:solidFill>
@@ -17577,7 +17577,7 @@
                         </a:rPr>
                         <a:t>□</a:t>
                       </a:r>
-                      <a:endParaRPr lang="en-US" sz="2400" dirty="0">
+                      <a:endParaRPr lang="en-US" sz="2600" dirty="0">
                         <a:latin typeface="맑은 고딕" charset="0"/>
                         <a:ea typeface="맑은 고딕" charset="0"/>
                         <a:cs typeface="맑은 고딕" charset="0"/>
@@ -18623,7 +18623,7 @@
           </p:nvPr>
         </p:nvGraphicFramePr>
         <p:xfrm>
-          <a:off x="7956469" y="2042160"/>
+          <a:off x="7956469" y="2089785"/>
           <a:ext cx="3291840" cy="914400"/>
         </p:xfrm>
         <a:graphic>
@@ -18635,7 +18635,7 @@
                 <a:gridCol w="1097280"/>
                 <a:gridCol w="1097280"/>
               </a:tblGrid>
-              <a:tr h="609600">
+              <a:tr h="590550">
                 <a:tc>
                   <a:txBody>
                     <a:bodyPr/>
@@ -18830,7 +18830,7 @@
                   </a:tcPr>
                 </a:tc>
               </a:tr>
-              <a:tr h="609600">
+              <a:tr h="590550">
                 <a:tc>
                   <a:txBody>
                     <a:bodyPr/>
@@ -19025,7 +19025,7 @@
                   </a:tcPr>
                 </a:tc>
               </a:tr>
-              <a:tr h="609600">
+              <a:tr h="590550">
                 <a:tc>
                   <a:txBody>
                     <a:bodyPr/>
@@ -19220,7 +19220,7 @@
                   </a:tcPr>
                 </a:tc>
               </a:tr>
-              <a:tr h="609600">
+              <a:tr h="590550">
                 <a:tc>
                   <a:txBody>
                     <a:bodyPr/>
@@ -19426,7 +19426,7 @@
                   </a:tcPr>
                 </a:tc>
               </a:tr>
-              <a:tr h="609600">
+              <a:tr h="590550">
                 <a:tc>
                   <a:txBody>
                     <a:bodyPr/>
